--- a/a7/packages/A7 Unit 6 - Relationships in Triangles/Lessons/6.T2/A7 6.T2 Interior and Exterior Angles of a Triangle - Slides.pptx
+++ b/a7/packages/A7 Unit 6 - Relationships in Triangles/Lessons/6.T2/A7 6.T2 Interior and Exterior Angles of a Triangle - Slides.pptx
@@ -6896,7 +6896,7 @@
                 </a:solidFill>
                 <a:latin typeface="Lexend"/>
               </a:rPr>
-              <a:t>An isosceles triangle has two base angles of 52°.</a:t>
+              <a:t>An isosceles triangle's two base angles are equal. Each is 52°.</a:t>
             </a:r>
           </a:p>
         </p:txBody>
@@ -7229,7 +7229,7 @@
                 </a:solidFill>
                 <a:latin typeface="Lexend"/>
               </a:rPr>
-              <a:t>An isosceles triangle has two base angles of 52°.</a:t>
+              <a:t>An isosceles triangle's two base angles are equal. Each is 52°.</a:t>
             </a:r>
           </a:p>
         </p:txBody>
@@ -7624,7 +7624,7 @@
         <p:spPr>
           <a:xfrm>
             <a:off x="1874519" y="2052828"/>
-            <a:ext cx="9621293" cy="457200"/>
+            <a:ext cx="3329754" cy="457200"/>
           </a:xfrm>
           <a:prstGeom prst="rect">
             <a:avLst/>
@@ -7645,14 +7645,132 @@
                 </a:solidFill>
                 <a:latin typeface="Lexend"/>
               </a:rPr>
-              <a:t>2.   A 10-ft ladder's foot is 6 ft from a wall. How high does it reach?</a:t>
-            </a:r>
-          </a:p>
-        </p:txBody>
-      </p:sp>
-      <p:sp>
-        <p:nvSpPr>
-          <p:cNvPr id="10" name="TextBox 9"/>
+              <a:t>2.   How far apart are </a:t>
+            </a:r>
+          </a:p>
+        </p:txBody>
+      </p:sp>
+      <p:pic>
+        <p:nvPicPr>
+          <p:cNvPr id="10" name="Picture 9" descr="d761eb6c578c3e79.png"/>
+          <p:cNvPicPr>
+            <a:picLocks noChangeAspect="1"/>
+          </p:cNvPicPr>
+          <p:nvPr/>
+        </p:nvPicPr>
+        <p:blipFill>
+          <a:blip r:embed="rId2"/>
+          <a:stretch>
+            <a:fillRect/>
+          </a:stretch>
+        </p:blipFill>
+        <p:spPr>
+          <a:xfrm>
+            <a:off x="5067114" y="2177367"/>
+            <a:ext cx="1127323" cy="270557"/>
+          </a:xfrm>
+          <a:prstGeom prst="rect">
+            <a:avLst/>
+          </a:prstGeom>
+        </p:spPr>
+      </p:pic>
+      <p:sp>
+        <p:nvSpPr>
+          <p:cNvPr id="11" name="TextBox 10"/>
+          <p:cNvSpPr txBox="1"/>
+          <p:nvPr/>
+        </p:nvSpPr>
+        <p:spPr>
+          <a:xfrm>
+            <a:off x="6194437" y="2052828"/>
+            <a:ext cx="922743" cy="457200"/>
+          </a:xfrm>
+          <a:prstGeom prst="rect">
+            <a:avLst/>
+          </a:prstGeom>
+          <a:noFill/>
+        </p:spPr>
+        <p:txBody>
+          <a:bodyPr wrap="none" lIns="45720" rIns="45720" tIns="18288" bIns="18288" anchor="ctr">
+            <a:noAutofit/>
+          </a:bodyPr>
+          <a:lstStyle/>
+          <a:p>
+            <a:pPr algn="l"/>
+            <a:r>
+              <a:rPr sz="2180" b="0" i="0">
+                <a:solidFill>
+                  <a:srgbClr val="1A1A1A"/>
+                </a:solidFill>
+                <a:latin typeface="Lexend"/>
+              </a:rPr>
+              <a:t> and </a:t>
+            </a:r>
+          </a:p>
+        </p:txBody>
+      </p:sp>
+      <p:pic>
+        <p:nvPicPr>
+          <p:cNvPr id="12" name="Picture 11" descr="afbf59c4acfdfec4.png"/>
+          <p:cNvPicPr>
+            <a:picLocks noChangeAspect="1"/>
+          </p:cNvPicPr>
+          <p:nvPr/>
+        </p:nvPicPr>
+        <p:blipFill>
+          <a:blip r:embed="rId3"/>
+          <a:stretch>
+            <a:fillRect/>
+          </a:stretch>
+        </p:blipFill>
+        <p:spPr>
+          <a:xfrm>
+            <a:off x="6980021" y="2179740"/>
+            <a:ext cx="688260" cy="268184"/>
+          </a:xfrm>
+          <a:prstGeom prst="rect">
+            <a:avLst/>
+          </a:prstGeom>
+        </p:spPr>
+      </p:pic>
+      <p:sp>
+        <p:nvSpPr>
+          <p:cNvPr id="13" name="TextBox 12"/>
+          <p:cNvSpPr txBox="1"/>
+          <p:nvPr/>
+        </p:nvSpPr>
+        <p:spPr>
+          <a:xfrm>
+            <a:off x="7668282" y="2052828"/>
+            <a:ext cx="360631" cy="457200"/>
+          </a:xfrm>
+          <a:prstGeom prst="rect">
+            <a:avLst/>
+          </a:prstGeom>
+          <a:noFill/>
+        </p:spPr>
+        <p:txBody>
+          <a:bodyPr wrap="none" lIns="45720" rIns="45720" tIns="18288" bIns="18288" anchor="ctr">
+            <a:noAutofit/>
+          </a:bodyPr>
+          <a:lstStyle/>
+          <a:p>
+            <a:pPr algn="l"/>
+            <a:r>
+              <a:rPr sz="2180" b="0" i="0">
+                <a:solidFill>
+                  <a:srgbClr val="1A1A1A"/>
+                </a:solidFill>
+                <a:latin typeface="Lexend"/>
+              </a:rPr>
+              <a:t>?</a:t>
+            </a:r>
+          </a:p>
+        </p:txBody>
+      </p:sp>
+      <p:sp>
+        <p:nvSpPr>
+          <p:cNvPr id="14" name="TextBox 13"/>
           <p:cNvSpPr txBox="1"/>
           <p:nvPr/>
         </p:nvSpPr>
@@ -7687,7 +7805,7 @@
       </p:sp>
       <p:sp>
         <p:nvSpPr>
-          <p:cNvPr id="11" name="TextBox 10"/>
+          <p:cNvPr id="15" name="TextBox 14"/>
           <p:cNvSpPr txBox="1"/>
           <p:nvPr/>
         </p:nvSpPr>
@@ -13093,7 +13211,7 @@
         <p:spPr>
           <a:xfrm>
             <a:off x="1874519" y="2052828"/>
-            <a:ext cx="9621293" cy="457200"/>
+            <a:ext cx="3329754" cy="457200"/>
           </a:xfrm>
           <a:prstGeom prst="rect">
             <a:avLst/>
@@ -13114,84 +13232,14 @@
                 </a:solidFill>
                 <a:latin typeface="Lexend"/>
               </a:rPr>
-              <a:t>2.   A 10-ft ladder's foot is 6 ft from a wall. How high does it reach?</a:t>
-            </a:r>
-          </a:p>
-        </p:txBody>
-      </p:sp>
-      <p:sp>
-        <p:nvSpPr>
-          <p:cNvPr id="11" name="TextBox 10"/>
-          <p:cNvSpPr txBox="1"/>
-          <p:nvPr/>
-        </p:nvSpPr>
-        <p:spPr>
-          <a:xfrm>
-            <a:off x="2606040" y="2510028"/>
-            <a:ext cx="714174" cy="457200"/>
-          </a:xfrm>
-          <a:prstGeom prst="rect">
-            <a:avLst/>
-          </a:prstGeom>
-          <a:noFill/>
-        </p:spPr>
-        <p:txBody>
-          <a:bodyPr wrap="none" lIns="45720" rIns="45720" tIns="18288" bIns="18288" anchor="ctr">
-            <a:noAutofit/>
-          </a:bodyPr>
-          <a:lstStyle/>
-          <a:p>
-            <a:pPr algn="l"/>
-            <a:r>
-              <a:rPr sz="2180" b="1" i="0">
-                <a:solidFill>
-                  <a:srgbClr val="9E1B32"/>
-                </a:solidFill>
-                <a:latin typeface="Lexend"/>
-              </a:rPr>
-              <a:t>8 ft</a:t>
-            </a:r>
-          </a:p>
-        </p:txBody>
-      </p:sp>
-      <p:sp>
-        <p:nvSpPr>
-          <p:cNvPr id="12" name="TextBox 11"/>
-          <p:cNvSpPr txBox="1"/>
-          <p:nvPr/>
-        </p:nvSpPr>
-        <p:spPr>
-          <a:xfrm>
-            <a:off x="1874519" y="3122676"/>
-            <a:ext cx="6577235" cy="457200"/>
-          </a:xfrm>
-          <a:prstGeom prst="rect">
-            <a:avLst/>
-          </a:prstGeom>
-          <a:noFill/>
-        </p:spPr>
-        <p:txBody>
-          <a:bodyPr wrap="none" lIns="45720" rIns="45720" tIns="18288" bIns="18288" anchor="ctr">
-            <a:noAutofit/>
-          </a:bodyPr>
-          <a:lstStyle/>
-          <a:p>
-            <a:pPr algn="l"/>
-            <a:r>
-              <a:rPr sz="2180" b="0" i="0">
-                <a:solidFill>
-                  <a:srgbClr val="1A1A1A"/>
-                </a:solidFill>
-                <a:latin typeface="Lexend"/>
-              </a:rPr>
-              <a:t>3.   12 pens cost $9. What does one pen cost?</a:t>
+              <a:t>2.   How far apart are </a:t>
             </a:r>
           </a:p>
         </p:txBody>
       </p:sp>
       <p:pic>
         <p:nvPicPr>
-          <p:cNvPr id="13" name="Picture 12" descr="65fcf4c9093b5598.png"/>
+          <p:cNvPr id="11" name="Picture 10" descr="d761eb6c578c3e79.png"/>
           <p:cNvPicPr>
             <a:picLocks noChangeAspect="1"/>
           </p:cNvPicPr>
@@ -13205,8 +13253,8 @@
         </p:blipFill>
         <p:spPr>
           <a:xfrm>
-            <a:off x="8863235" y="3241357"/>
-            <a:ext cx="408432" cy="225552"/>
+            <a:off x="5067114" y="2177367"/>
+            <a:ext cx="1127323" cy="270557"/>
           </a:xfrm>
           <a:prstGeom prst="rect">
             <a:avLst/>
@@ -13215,14 +13263,14 @@
       </p:pic>
       <p:sp>
         <p:nvSpPr>
-          <p:cNvPr id="14" name="TextBox 13"/>
-          <p:cNvSpPr txBox="1"/>
-          <p:nvPr/>
-        </p:nvSpPr>
-        <p:spPr>
-          <a:xfrm>
-            <a:off x="1874519" y="3735324"/>
-            <a:ext cx="7962483" cy="457200"/>
+          <p:cNvPr id="12" name="TextBox 11"/>
+          <p:cNvSpPr txBox="1"/>
+          <p:nvPr/>
+        </p:nvSpPr>
+        <p:spPr>
+          <a:xfrm>
+            <a:off x="6194437" y="2052828"/>
+            <a:ext cx="922743" cy="457200"/>
           </a:xfrm>
           <a:prstGeom prst="rect">
             <a:avLst/>
@@ -13243,6 +13291,205 @@
                 </a:solidFill>
                 <a:latin typeface="Lexend"/>
               </a:rPr>
+              <a:t> and </a:t>
+            </a:r>
+          </a:p>
+        </p:txBody>
+      </p:sp>
+      <p:pic>
+        <p:nvPicPr>
+          <p:cNvPr id="13" name="Picture 12" descr="afbf59c4acfdfec4.png"/>
+          <p:cNvPicPr>
+            <a:picLocks noChangeAspect="1"/>
+          </p:cNvPicPr>
+          <p:nvPr/>
+        </p:nvPicPr>
+        <p:blipFill>
+          <a:blip r:embed="rId3"/>
+          <a:stretch>
+            <a:fillRect/>
+          </a:stretch>
+        </p:blipFill>
+        <p:spPr>
+          <a:xfrm>
+            <a:off x="6980021" y="2179740"/>
+            <a:ext cx="688260" cy="268184"/>
+          </a:xfrm>
+          <a:prstGeom prst="rect">
+            <a:avLst/>
+          </a:prstGeom>
+        </p:spPr>
+      </p:pic>
+      <p:sp>
+        <p:nvSpPr>
+          <p:cNvPr id="14" name="TextBox 13"/>
+          <p:cNvSpPr txBox="1"/>
+          <p:nvPr/>
+        </p:nvSpPr>
+        <p:spPr>
+          <a:xfrm>
+            <a:off x="7668282" y="2052828"/>
+            <a:ext cx="360631" cy="457200"/>
+          </a:xfrm>
+          <a:prstGeom prst="rect">
+            <a:avLst/>
+          </a:prstGeom>
+          <a:noFill/>
+        </p:spPr>
+        <p:txBody>
+          <a:bodyPr wrap="none" lIns="45720" rIns="45720" tIns="18288" bIns="18288" anchor="ctr">
+            <a:noAutofit/>
+          </a:bodyPr>
+          <a:lstStyle/>
+          <a:p>
+            <a:pPr algn="l"/>
+            <a:r>
+              <a:rPr sz="2180" b="0" i="0">
+                <a:solidFill>
+                  <a:srgbClr val="1A1A1A"/>
+                </a:solidFill>
+                <a:latin typeface="Lexend"/>
+              </a:rPr>
+              <a:t>?</a:t>
+            </a:r>
+          </a:p>
+        </p:txBody>
+      </p:sp>
+      <p:sp>
+        <p:nvSpPr>
+          <p:cNvPr id="15" name="TextBox 14"/>
+          <p:cNvSpPr txBox="1"/>
+          <p:nvPr/>
+        </p:nvSpPr>
+        <p:spPr>
+          <a:xfrm>
+            <a:off x="8440393" y="2052828"/>
+            <a:ext cx="1405974" cy="457200"/>
+          </a:xfrm>
+          <a:prstGeom prst="rect">
+            <a:avLst/>
+          </a:prstGeom>
+          <a:noFill/>
+        </p:spPr>
+        <p:txBody>
+          <a:bodyPr wrap="none" lIns="45720" rIns="45720" tIns="18288" bIns="18288" anchor="ctr">
+            <a:noAutofit/>
+          </a:bodyPr>
+          <a:lstStyle/>
+          <a:p>
+            <a:pPr algn="l"/>
+            <a:r>
+              <a:rPr sz="2180" b="1" i="0">
+                <a:solidFill>
+                  <a:srgbClr val="9E1B32"/>
+                </a:solidFill>
+                <a:latin typeface="Lexend"/>
+              </a:rPr>
+              <a:t>10 units</a:t>
+            </a:r>
+          </a:p>
+        </p:txBody>
+      </p:sp>
+      <p:sp>
+        <p:nvSpPr>
+          <p:cNvPr id="16" name="TextBox 15"/>
+          <p:cNvSpPr txBox="1"/>
+          <p:nvPr/>
+        </p:nvSpPr>
+        <p:spPr>
+          <a:xfrm>
+            <a:off x="1874519" y="2665476"/>
+            <a:ext cx="6577235" cy="457200"/>
+          </a:xfrm>
+          <a:prstGeom prst="rect">
+            <a:avLst/>
+          </a:prstGeom>
+          <a:noFill/>
+        </p:spPr>
+        <p:txBody>
+          <a:bodyPr wrap="none" lIns="45720" rIns="45720" tIns="18288" bIns="18288" anchor="ctr">
+            <a:noAutofit/>
+          </a:bodyPr>
+          <a:lstStyle/>
+          <a:p>
+            <a:pPr algn="l"/>
+            <a:r>
+              <a:rPr sz="2180" b="0" i="0">
+                <a:solidFill>
+                  <a:srgbClr val="1A1A1A"/>
+                </a:solidFill>
+                <a:latin typeface="Lexend"/>
+              </a:rPr>
+              <a:t>3.   12 pens cost $9. What does one pen cost?</a:t>
+            </a:r>
+          </a:p>
+        </p:txBody>
+      </p:sp>
+      <p:sp>
+        <p:nvSpPr>
+          <p:cNvPr id="17" name="TextBox 16"/>
+          <p:cNvSpPr txBox="1"/>
+          <p:nvPr/>
+        </p:nvSpPr>
+        <p:spPr>
+          <a:xfrm>
+            <a:off x="8863235" y="2665476"/>
+            <a:ext cx="1008868" cy="457200"/>
+          </a:xfrm>
+          <a:prstGeom prst="rect">
+            <a:avLst/>
+          </a:prstGeom>
+          <a:noFill/>
+        </p:spPr>
+        <p:txBody>
+          <a:bodyPr wrap="none" lIns="45720" rIns="45720" tIns="18288" bIns="18288" anchor="ctr">
+            <a:noAutofit/>
+          </a:bodyPr>
+          <a:lstStyle/>
+          <a:p>
+            <a:pPr algn="l"/>
+            <a:r>
+              <a:rPr sz="2180" b="1" i="0">
+                <a:solidFill>
+                  <a:srgbClr val="9E1B32"/>
+                </a:solidFill>
+                <a:latin typeface="Lexend"/>
+              </a:rPr>
+              <a:t>$0.75</a:t>
+            </a:r>
+          </a:p>
+        </p:txBody>
+      </p:sp>
+      <p:sp>
+        <p:nvSpPr>
+          <p:cNvPr id="18" name="TextBox 17"/>
+          <p:cNvSpPr txBox="1"/>
+          <p:nvPr/>
+        </p:nvSpPr>
+        <p:spPr>
+          <a:xfrm>
+            <a:off x="1874519" y="3278124"/>
+            <a:ext cx="7962483" cy="457200"/>
+          </a:xfrm>
+          <a:prstGeom prst="rect">
+            <a:avLst/>
+          </a:prstGeom>
+          <a:noFill/>
+        </p:spPr>
+        <p:txBody>
+          <a:bodyPr wrap="none" lIns="45720" rIns="45720" tIns="18288" bIns="18288" anchor="ctr">
+            <a:noAutofit/>
+          </a:bodyPr>
+          <a:lstStyle/>
+          <a:p>
+            <a:pPr algn="l"/>
+            <a:r>
+              <a:rPr sz="2180" b="0" i="0">
+                <a:solidFill>
+                  <a:srgbClr val="1A1A1A"/>
+                </a:solidFill>
+                <a:latin typeface="Lexend"/>
+              </a:rPr>
               <a:t>4.   A straight angle is split into 50°, 60° and x°. Find x.</a:t>
             </a:r>
           </a:p>
@@ -13250,13 +13497,13 @@
       </p:sp>
       <p:sp>
         <p:nvSpPr>
-          <p:cNvPr id="15" name="TextBox 14"/>
-          <p:cNvSpPr txBox="1"/>
-          <p:nvPr/>
-        </p:nvSpPr>
-        <p:spPr>
-          <a:xfrm>
-            <a:off x="10248483" y="3735324"/>
+          <p:cNvPr id="19" name="TextBox 18"/>
+          <p:cNvSpPr txBox="1"/>
+          <p:nvPr/>
+        </p:nvSpPr>
+        <p:spPr>
+          <a:xfrm>
+            <a:off x="10248483" y="3278124"/>
             <a:ext cx="571498" cy="457200"/>
           </a:xfrm>
           <a:prstGeom prst="rect">
@@ -15029,7 +15276,7 @@
         <p:spPr>
           <a:xfrm>
             <a:off x="1554480" y="2028178"/>
-            <a:ext cx="9920933" cy="417443"/>
+            <a:ext cx="9606506" cy="417443"/>
           </a:xfrm>
           <a:prstGeom prst="rect">
             <a:avLst/>
@@ -15050,7 +15297,7 @@
                 </a:solidFill>
                 <a:latin typeface="Lexend"/>
               </a:rPr>
-              <a:t>The angle between the two equal sides of an isosceles triangle is 40°. Find </a:t>
+              <a:t>An isosceles triangle's two base angles are equal. The angle between its </a:t>
             </a:r>
           </a:p>
         </p:txBody>
@@ -15064,7 +15311,7 @@
         <p:spPr>
           <a:xfrm>
             <a:off x="1554480" y="2431310"/>
-            <a:ext cx="2404157" cy="417443"/>
+            <a:ext cx="6023716" cy="417443"/>
           </a:xfrm>
           <a:prstGeom prst="rect">
             <a:avLst/>
@@ -15085,7 +15332,7 @@
                 </a:solidFill>
                 <a:latin typeface="Lexend"/>
               </a:rPr>
-              <a:t>each base angle.</a:t>
+              <a:t>two equal sides is 40°. Find each base angle.</a:t>
             </a:r>
           </a:p>
         </p:txBody>
@@ -17293,17 +17540,17 @@
         </p:nvSpPr>
         <p:spPr>
           <a:xfrm>
-            <a:off x="987552" y="5437525"/>
-            <a:ext cx="10131551" cy="475488"/>
-          </a:xfrm>
-          <a:prstGeom prst="rect">
-            <a:avLst/>
-          </a:prstGeom>
-          <a:noFill/>
-        </p:spPr>
-        <p:txBody>
-          <a:bodyPr wrap="square" lIns="45720" rIns="45720" tIns="18288" bIns="18288" anchor="t">
-            <a:spAutoFit/>
+            <a:off x="987552" y="5396377"/>
+            <a:ext cx="5980303" cy="457200"/>
+          </a:xfrm>
+          <a:prstGeom prst="rect">
+            <a:avLst/>
+          </a:prstGeom>
+          <a:noFill/>
+        </p:spPr>
+        <p:txBody>
+          <a:bodyPr wrap="none" lIns="45720" rIns="45720" tIns="18288" bIns="18288" anchor="ctr">
+            <a:noAutofit/>
           </a:bodyPr>
           <a:lstStyle/>
           <a:p>
@@ -17315,11 +17562,35 @@
                 </a:solidFill>
                 <a:latin typeface="Lexend"/>
               </a:rPr>
-              <a:t>The three interior angles of a triangle add to 180°.</a:t>
-            </a:r>
-          </a:p>
-        </p:txBody>
-      </p:sp>
+              <a:t>A triangle's three angles add to 180°:  </a:t>
+            </a:r>
+          </a:p>
+        </p:txBody>
+      </p:sp>
+      <p:pic>
+        <p:nvPicPr>
+          <p:cNvPr id="15" name="Picture 14" descr="9263d6474ca215dc.png"/>
+          <p:cNvPicPr>
+            <a:picLocks noChangeAspect="1"/>
+          </p:cNvPicPr>
+          <p:nvPr/>
+        </p:nvPicPr>
+        <p:blipFill>
+          <a:blip r:embed="rId5"/>
+          <a:stretch>
+            <a:fillRect/>
+          </a:stretch>
+        </p:blipFill>
+        <p:spPr>
+          <a:xfrm>
+            <a:off x="6830695" y="5520916"/>
+            <a:ext cx="3540982" cy="218344"/>
+          </a:xfrm>
+          <a:prstGeom prst="rect">
+            <a:avLst/>
+          </a:prstGeom>
+        </p:spPr>
+      </p:pic>
     </p:spTree>
   </p:cSld>
   <p:clrMapOvr>

--- a/a7/packages/A7 Unit 6 - Relationships in Triangles/Lessons/6.T2/A7 6.T2 Interior and Exterior Angles of a Triangle - Slides.pptx
+++ b/a7/packages/A7 Unit 6 - Relationships in Triangles/Lessons/6.T2/A7 6.T2 Interior and Exterior Angles of a Triangle - Slides.pptx
@@ -16474,7 +16474,7 @@
                 </a:solidFill>
                 <a:latin typeface="Lexend"/>
               </a:rPr>
-              <a:t>Every skill listed is required, to a SmartScore of 67. Due at the start of the next class.</a:t>
+              <a:t>Every skill listed is required, to a SmartScore of 67. Due by the Unit 11 test.</a:t>
             </a:r>
           </a:p>
         </p:txBody>

--- a/a7/packages/A7 Unit 6 - Relationships in Triangles/Lessons/6.T2/A7 6.T2 Interior and Exterior Angles of a Triangle - Slides.pptx
+++ b/a7/packages/A7 Unit 6 - Relationships in Triangles/Lessons/6.T2/A7 6.T2 Interior and Exterior Angles of a Triangle - Slides.pptx
@@ -7652,7 +7652,7 @@
       </p:sp>
       <p:pic>
         <p:nvPicPr>
-          <p:cNvPr id="10" name="Picture 9" descr="d761eb6c578c3e79.png"/>
+          <p:cNvPr id="10" name="Picture 9" descr="b7db7bdb84bac6e6.png"/>
           <p:cNvPicPr>
             <a:picLocks noChangeAspect="1"/>
           </p:cNvPicPr>
@@ -7667,7 +7667,7 @@
         <p:spPr>
           <a:xfrm>
             <a:off x="5067114" y="2177367"/>
-            <a:ext cx="1127323" cy="270557"/>
+            <a:ext cx="1018151" cy="270557"/>
           </a:xfrm>
           <a:prstGeom prst="rect">
             <a:avLst/>
@@ -7682,7 +7682,7 @@
         </p:nvSpPr>
         <p:spPr>
           <a:xfrm>
-            <a:off x="6194437" y="2052828"/>
+            <a:off x="6085265" y="2052828"/>
             <a:ext cx="922743" cy="457200"/>
           </a:xfrm>
           <a:prstGeom prst="rect">
@@ -7725,7 +7725,7 @@
         </p:blipFill>
         <p:spPr>
           <a:xfrm>
-            <a:off x="6980021" y="2179740"/>
+            <a:off x="6870849" y="2179740"/>
             <a:ext cx="688260" cy="268184"/>
           </a:xfrm>
           <a:prstGeom prst="rect">
@@ -7741,7 +7741,7 @@
         </p:nvSpPr>
         <p:spPr>
           <a:xfrm>
-            <a:off x="7668282" y="2052828"/>
+            <a:off x="7559109" y="2052828"/>
             <a:ext cx="360631" cy="457200"/>
           </a:xfrm>
           <a:prstGeom prst="rect">
@@ -13239,7 +13239,7 @@
       </p:sp>
       <p:pic>
         <p:nvPicPr>
-          <p:cNvPr id="11" name="Picture 10" descr="d761eb6c578c3e79.png"/>
+          <p:cNvPr id="11" name="Picture 10" descr="b7db7bdb84bac6e6.png"/>
           <p:cNvPicPr>
             <a:picLocks noChangeAspect="1"/>
           </p:cNvPicPr>
@@ -13254,7 +13254,7 @@
         <p:spPr>
           <a:xfrm>
             <a:off x="5067114" y="2177367"/>
-            <a:ext cx="1127323" cy="270557"/>
+            <a:ext cx="1018151" cy="270557"/>
           </a:xfrm>
           <a:prstGeom prst="rect">
             <a:avLst/>
@@ -13269,7 +13269,7 @@
         </p:nvSpPr>
         <p:spPr>
           <a:xfrm>
-            <a:off x="6194437" y="2052828"/>
+            <a:off x="6085265" y="2052828"/>
             <a:ext cx="922743" cy="457200"/>
           </a:xfrm>
           <a:prstGeom prst="rect">
@@ -13312,7 +13312,7 @@
         </p:blipFill>
         <p:spPr>
           <a:xfrm>
-            <a:off x="6980021" y="2179740"/>
+            <a:off x="6870849" y="2179740"/>
             <a:ext cx="688260" cy="268184"/>
           </a:xfrm>
           <a:prstGeom prst="rect">
@@ -13328,7 +13328,7 @@
         </p:nvSpPr>
         <p:spPr>
           <a:xfrm>
-            <a:off x="7668282" y="2052828"/>
+            <a:off x="7559109" y="2052828"/>
             <a:ext cx="360631" cy="457200"/>
           </a:xfrm>
           <a:prstGeom prst="rect">
@@ -13363,7 +13363,7 @@
         </p:nvSpPr>
         <p:spPr>
           <a:xfrm>
-            <a:off x="8440393" y="2052828"/>
+            <a:off x="8331221" y="2052828"/>
             <a:ext cx="1405974" cy="457200"/>
           </a:xfrm>
           <a:prstGeom prst="rect">
@@ -14502,7 +14502,7 @@
                 </a:solidFill>
                 <a:latin typeface="Lexend"/>
               </a:rPr>
-              <a:t>Why is an exterior angle always bigger than either remote interior angle?</a:t>
+              <a:t>Why is an exterior angle of a triangle always bigger than either of its remote interior angles? Explain.</a:t>
             </a:r>
           </a:p>
         </p:txBody>
@@ -14800,7 +14800,7 @@
                 </a:solidFill>
                 <a:latin typeface="Lexend"/>
               </a:rPr>
-              <a:t>Why is an exterior angle always bigger than either remote interior angle?</a:t>
+              <a:t>Why is an exterior angle of a triangle always bigger than either of its remote interior angles? Explain.</a:t>
             </a:r>
           </a:p>
         </p:txBody>
